--- a/mat_did/Material GIT/Apresentação do GIT.pptx
+++ b/mat_did/Material GIT/Apresentação do GIT.pptx
@@ -135,6 +135,7 @@
 <file path=ppt/revisionInfo.xml><?xml version="1.0" encoding="utf-8"?>
 <p1510:revInfo xmlns:a="http://schemas.openxmlformats.org/drawingml/2006/main" xmlns:r="http://schemas.openxmlformats.org/officeDocument/2006/relationships" xmlns:p1510="http://schemas.microsoft.com/office/powerpoint/2015/10/main">
   <p1510:revLst>
+    <p1510:client id="{28FAA37B-992D-4FF8-B296-436558A1F2C8}" v="15" dt="2026-04-28T15:42:15.675"/>
     <p1510:client id="{610849D6-C85D-4B35-99CD-8522A345350E}" v="2279" dt="2026-04-27T15:07:06.276"/>
     <p1510:client id="{8E7718AC-2879-46FD-AC97-422BF3633D83}" v="329" dt="2026-04-27T15:57:17.213"/>
     <p1510:client id="{F774D46D-85C0-4673-8C61-ACC0FE538728}" v="464" dt="2026-04-28T15:33:08.594"/>
@@ -11123,91 +11124,98 @@
           <a:lstStyle/>
           <a:p>
             <a:pPr>
-              <a:buNone/>
-            </a:pPr>
-            <a:r>
-              <a:rPr lang="pt-BR" b="1" dirty="0"/>
-              <a:t>Documentos: </a:t>
-            </a:r>
-            <a:r>
-              <a:rPr lang="pt-BR" b="1" dirty="0" err="1"/>
+              <a:buFont typeface=""/>
+              <a:buChar char="•"/>
+            </a:pPr>
+            <a:r>
+              <a:rPr lang="pt-BR" dirty="0"/>
+              <a:t>FLEURY, Cláudio A. </a:t>
+            </a:r>
+            <a:r>
+              <a:rPr lang="pt-BR" i="1" dirty="0" err="1"/>
               <a:t>Git</a:t>
             </a:r>
             <a:r>
-              <a:rPr lang="pt-BR" b="1" dirty="0"/>
-              <a:t> - Olhando sob o capô.pdf e Git.pdf</a:t>
+              <a:rPr lang="pt-BR" i="1" dirty="0"/>
+              <a:t> – Olhando sob o capô</a:t>
+            </a:r>
+            <a:r>
+              <a:rPr lang="pt-BR" dirty="0"/>
+              <a:t>. </a:t>
             </a:r>
           </a:p>
           <a:p>
             <a:pPr>
-              <a:buNone/>
-            </a:pPr>
-            <a:r>
-              <a:rPr lang="pt-BR" b="1"/>
-              <a:t>Autor: </a:t>
-            </a:r>
-            <a:r>
-              <a:rPr lang="pt-BR" b="1">
+              <a:buFont typeface=""/>
+              <a:buChar char="•"/>
+            </a:pPr>
+            <a:r>
+              <a:rPr lang="pt-BR"/>
+              <a:t>FLEURY, Cláudio A. </a:t>
+            </a:r>
+            <a:r>
+              <a:rPr lang="pt-BR" i="1"/>
+              <a:t>Git.pdf</a:t>
+            </a:r>
+            <a:r>
+              <a:rPr lang="pt-BR"/>
+              <a:t>. </a:t>
+            </a:r>
+          </a:p>
+          <a:p>
+            <a:pPr>
+              <a:buFont typeface=""/>
+              <a:buChar char="•"/>
+            </a:pPr>
+            <a:r>
+              <a:rPr lang="pt-BR" dirty="0"/>
+              <a:t>HOSTINGER. </a:t>
+            </a:r>
+            <a:r>
+              <a:rPr lang="pt-BR" i="1" dirty="0"/>
+              <a:t>Comandos </a:t>
+            </a:r>
+            <a:r>
+              <a:rPr lang="pt-BR" i="1" dirty="0" err="1"/>
+              <a:t>Git</a:t>
+            </a:r>
+            <a:r>
+              <a:rPr lang="pt-BR" dirty="0"/>
+              <a:t>. Disponível em: https://www.hostinger.com/</a:t>
+            </a:r>
+            <a:r>
+              <a:rPr lang="pt-BR" dirty="0" err="1"/>
+              <a:t>br</a:t>
+            </a:r>
+            <a:r>
+              <a:rPr lang="pt-BR" dirty="0"/>
+              <a:t>/tutoriais/comandos. </a:t>
+            </a:r>
+            <a:endParaRPr lang="pt-BR" b="1" dirty="0"/>
+          </a:p>
+          <a:p>
+            <a:pPr>
+              <a:buFont typeface=""/>
+              <a:buChar char="•"/>
+            </a:pPr>
+            <a:r>
+              <a:rPr lang="pt-BR"/>
+              <a:t>Acesso em: 27 abr. 2026</a:t>
+            </a:r>
+          </a:p>
+          <a:p>
+            <a:pPr>
+              <a:buFont typeface=""/>
+              <a:buChar char="•"/>
+            </a:pPr>
+            <a:r>
+              <a:rPr lang="pt-BR">
                 <a:ea typeface="+mn-lt"/>
                 <a:cs typeface="+mn-lt"/>
               </a:rPr>
-              <a:t>Prof. Cláudio A. Fleury </a:t>
-            </a:r>
-            <a:endParaRPr lang="pt-BR" b="1" dirty="0"/>
-          </a:p>
-          <a:p>
-            <a:pPr>
-              <a:buNone/>
-            </a:pPr>
-            <a:endParaRPr lang="pt-BR" b="1" dirty="0"/>
-          </a:p>
-          <a:p>
-            <a:pPr>
-              <a:buNone/>
-            </a:pPr>
-            <a:r>
-              <a:rPr lang="pt-BR" b="1">
-                <a:ea typeface="+mn-lt"/>
-                <a:cs typeface="+mn-lt"/>
-              </a:rPr>
-              <a:t>Sites: https://www.hostinger.com/br/tutoriais/comandos</a:t>
-            </a:r>
-            <a:endParaRPr lang="pt-BR" b="1"/>
-          </a:p>
-          <a:p>
-            <a:pPr>
-              <a:buNone/>
-            </a:pPr>
-            <a:endParaRPr lang="pt-BR" b="1" dirty="0"/>
-          </a:p>
-          <a:p>
-            <a:pPr>
-              <a:buNone/>
-            </a:pPr>
-            <a:r>
-              <a:rPr lang="pt-BR" b="1" dirty="0"/>
-              <a:t>Também feito com a assistência de LLM como </a:t>
-            </a:r>
-            <a:r>
-              <a:rPr lang="pt-BR" b="1" dirty="0" err="1"/>
-              <a:t>chatGPT</a:t>
-            </a:r>
-            <a:r>
-              <a:rPr lang="pt-BR" b="1" dirty="0"/>
-              <a:t> e Gemini</a:t>
-            </a:r>
-          </a:p>
-          <a:p>
-            <a:pPr>
-              <a:buNone/>
-            </a:pPr>
-            <a:endParaRPr lang="pt-BR" b="1" dirty="0"/>
-          </a:p>
-          <a:p>
-            <a:pPr>
-              <a:buNone/>
-            </a:pPr>
-            <a:endParaRPr lang="pt-BR" b="1" dirty="0"/>
+              <a:t>Apoio de ferramentas de IA: ChatGPT e Gemini.</a:t>
+            </a:r>
+            <a:endParaRPr lang="pt-BR" dirty="0"/>
           </a:p>
         </p:txBody>
       </p:sp>
